--- a/public/fun/cards/life/life-19.pptx
+++ b/public/fun/cards/life/life-19.pptx
@@ -3085,7 +3085,7 @@
     <p:bg>
       <p:bgPr>
         <a:solidFill>
-          <a:srgbClr val="FBF8F2"/>
+          <a:srgbClr val="E7F5EE"/>
         </a:solidFill>
         <a:effectLst/>
       </p:bgPr>
@@ -3099,20 +3099,20 @@
       <p:grpSpPr/>
       <p:sp>
         <p:nvSpPr>
-          <p:cNvPr id="2" name="Rectangle 1"/>
+          <p:cNvPr id="2" name="Oval 1"/>
           <p:cNvSpPr/>
           <p:nvPr/>
         </p:nvSpPr>
         <p:spPr>
           <a:xfrm>
-            <a:off x="2196000" y="0"/>
-            <a:ext cx="1044000" cy="1800000"/>
+            <a:off x="547200" y="475200"/>
+            <a:ext cx="849600" cy="849600"/>
           </a:xfrm>
-          <a:prstGeom prst="rect">
+          <a:prstGeom prst="ellipse">
             <a:avLst/>
           </a:prstGeom>
           <a:solidFill>
-            <a:srgbClr val="3B9171"/>
+            <a:srgbClr val="C9E9D9"/>
           </a:solidFill>
           <a:ln>
             <a:noFill/>
@@ -3134,45 +3134,16 @@
         </p:nvSpPr>
         <p:spPr>
           <a:xfrm>
-            <a:off x="2627280" y="528480"/>
-            <a:ext cx="181440" cy="241920"/>
+            <a:off x="187200" y="475200"/>
+            <a:ext cx="849600" cy="849600"/>
           </a:xfrm>
           <a:prstGeom prst="ellipse">
             <a:avLst/>
           </a:prstGeom>
-          <a:noFill/>
-          <a:ln w="35280">
-            <a:solidFill>
-              <a:srgbClr val="737373"/>
-            </a:solidFill>
-          </a:ln>
-        </p:spPr>
-        <p:txBody>
-          <a:bodyPr rtlCol="0" anchor="ctr"/>
-          <a:lstStyle/>
-          <a:p>
-            <a:pPr algn="ctr"/>
-          </a:p>
-        </p:txBody>
-      </p:sp>
-      <p:sp>
-        <p:nvSpPr>
-          <p:cNvPr id="4" name="Rounded Rectangle 3"/>
-          <p:cNvSpPr/>
-          <p:nvPr/>
-        </p:nvSpPr>
-        <p:spPr>
-          <a:xfrm>
-            <a:off x="2526480" y="669600"/>
-            <a:ext cx="383040" cy="262080"/>
-          </a:xfrm>
-          <a:prstGeom prst="roundRect">
-            <a:avLst>
-              <a:gd name="adj" fmla="val 13461"/>
-            </a:avLst>
-          </a:prstGeom>
           <a:solidFill>
-            <a:srgbClr val="FFFFFF"/>
+            <a:srgbClr val="0F9D58">
+              <a:alpha val="92000"/>
+            </a:srgbClr>
           </a:solidFill>
           <a:ln>
             <a:noFill/>
@@ -3188,14 +3159,14 @@
       </p:sp>
       <p:sp>
         <p:nvSpPr>
-          <p:cNvPr id="5" name="텍스트"/>
+          <p:cNvPr id="4" name="텍스트"/>
           <p:cNvSpPr txBox="1"/>
           <p:nvPr/>
         </p:nvSpPr>
         <p:spPr>
           <a:xfrm>
-            <a:off x="2268000" y="1224000"/>
-            <a:ext cx="900000" cy="216000"/>
+            <a:off x="1692000" y="223200"/>
+            <a:ext cx="1296000" cy="133351"/>
           </a:xfrm>
           <a:prstGeom prst="rect">
             <a:avLst/>
@@ -3208,15 +3179,15 @@
           </a:bodyPr>
           <a:lstStyle/>
           <a:p>
-            <a:pPr algn="ctr">
+            <a:pPr algn="l">
               <a:lnSpc>
-                <a:spcPts val="1160"/>
+                <a:spcPts val="1015"/>
               </a:lnSpc>
             </a:pPr>
             <a:r>
-              <a:rPr sz="800" b="1" spc="150">
+              <a:rPr sz="700" b="1" spc="200">
                 <a:solidFill>
-                  <a:srgbClr val="FFFFFF"/>
+                  <a:srgbClr val="114933"/>
                 </a:solidFill>
                 <a:latin typeface="맑은 고딕"/>
                 <a:ea typeface="맑은 고딕"/>
@@ -3228,14 +3199,14 @@
       </p:sp>
       <p:sp>
         <p:nvSpPr>
-          <p:cNvPr id="6" name="텍스트"/>
+          <p:cNvPr id="5" name="텍스트"/>
           <p:cNvSpPr txBox="1"/>
           <p:nvPr/>
         </p:nvSpPr>
         <p:spPr>
           <a:xfrm>
-            <a:off x="216000" y="331200"/>
-            <a:ext cx="1872000" cy="313692"/>
+            <a:off x="1692000" y="540000"/>
+            <a:ext cx="1368000" cy="360000"/>
           </a:xfrm>
           <a:prstGeom prst="rect">
             <a:avLst/>
@@ -3250,13 +3221,13 @@
           <a:p>
             <a:pPr algn="l">
               <a:lnSpc>
-                <a:spcPts val="2755"/>
+                <a:spcPts val="3190"/>
               </a:lnSpc>
             </a:pPr>
             <a:r>
-              <a:rPr sz="1900" b="1" spc="50">
+              <a:rPr sz="2200" b="1">
                 <a:solidFill>
-                  <a:srgbClr val="4D2019"/>
+                  <a:srgbClr val="12151C"/>
                 </a:solidFill>
                 <a:latin typeface="맑은 고딕"/>
                 <a:ea typeface="맑은 고딕"/>
@@ -3268,14 +3239,14 @@
       </p:sp>
       <p:sp>
         <p:nvSpPr>
-          <p:cNvPr id="7" name="텍스트"/>
+          <p:cNvPr id="6" name="텍스트"/>
           <p:cNvSpPr txBox="1"/>
           <p:nvPr/>
         </p:nvSpPr>
         <p:spPr>
           <a:xfrm>
-            <a:off x="216000" y="619200"/>
-            <a:ext cx="1872000" cy="122400"/>
+            <a:off x="1692000" y="943200"/>
+            <a:ext cx="1368000" cy="171451"/>
           </a:xfrm>
           <a:prstGeom prst="rect">
             <a:avLst/>
@@ -3290,13 +3261,13 @@
           <a:p>
             <a:pPr algn="l">
               <a:lnSpc>
-                <a:spcPts val="1232"/>
+                <a:spcPts val="1305"/>
               </a:lnSpc>
             </a:pPr>
             <a:r>
-              <a:rPr sz="850" b="1">
+              <a:rPr sz="900" b="0">
                 <a:solidFill>
-                  <a:srgbClr val="327B60"/>
+                  <a:srgbClr val="114933"/>
                 </a:solidFill>
                 <a:latin typeface="맑은 고딕"/>
                 <a:ea typeface="맑은 고딕"/>
@@ -3308,20 +3279,20 @@
       </p:sp>
       <p:sp>
         <p:nvSpPr>
-          <p:cNvPr id="8" name="Rectangle 7"/>
+          <p:cNvPr id="7" name="Rectangle 6"/>
           <p:cNvSpPr/>
           <p:nvPr/>
         </p:nvSpPr>
         <p:spPr>
           <a:xfrm>
-            <a:off x="216000" y="828000"/>
-            <a:ext cx="201600" cy="14400"/>
+            <a:off x="1692000" y="1195200"/>
+            <a:ext cx="144000" cy="18000"/>
           </a:xfrm>
           <a:prstGeom prst="rect">
             <a:avLst/>
           </a:prstGeom>
           <a:solidFill>
-            <a:srgbClr val="3B9171"/>
+            <a:srgbClr val="0F9D58"/>
           </a:solidFill>
           <a:ln>
             <a:noFill/>
@@ -3337,14 +3308,14 @@
       </p:sp>
       <p:sp>
         <p:nvSpPr>
-          <p:cNvPr id="9" name="텍스트"/>
+          <p:cNvPr id="8" name="텍스트"/>
           <p:cNvSpPr txBox="1"/>
           <p:nvPr/>
         </p:nvSpPr>
         <p:spPr>
           <a:xfrm>
-            <a:off x="216000" y="1008000"/>
-            <a:ext cx="122400" cy="168911"/>
+            <a:off x="1692000" y="1328400"/>
+            <a:ext cx="331200" cy="99061"/>
           </a:xfrm>
           <a:prstGeom prst="rect">
             <a:avLst/>
@@ -3359,32 +3330,32 @@
           <a:p>
             <a:pPr algn="l">
               <a:lnSpc>
-                <a:spcPts val="1015"/>
+                <a:spcPts val="754"/>
               </a:lnSpc>
             </a:pPr>
             <a:r>
-              <a:rPr sz="700" b="1">
+              <a:rPr sz="520" b="1" spc="120">
                 <a:solidFill>
-                  <a:srgbClr val="327B60"/>
+                  <a:srgbClr val="114933"/>
                 </a:solidFill>
                 <a:latin typeface="맑은 고딕"/>
                 <a:ea typeface="맑은 고딕"/>
               </a:rPr>
-              <a:t>T</a:t>
-            </a:r>
-          </a:p>
-        </p:txBody>
-      </p:sp>
-      <p:sp>
-        <p:nvSpPr>
-          <p:cNvPr id="10" name="텍스트"/>
+              <a:t>TEL</a:t>
+            </a:r>
+          </a:p>
+        </p:txBody>
+      </p:sp>
+      <p:sp>
+        <p:nvSpPr>
+          <p:cNvPr id="9" name="텍스트"/>
           <p:cNvSpPr txBox="1"/>
           <p:nvPr/>
         </p:nvSpPr>
         <p:spPr>
           <a:xfrm>
-            <a:off x="360000" y="1008000"/>
-            <a:ext cx="1584000" cy="168911"/>
+            <a:off x="2023200" y="1317600"/>
+            <a:ext cx="1188000" cy="125731"/>
           </a:xfrm>
           <a:prstGeom prst="rect">
             <a:avLst/>
@@ -3399,13 +3370,13 @@
           <a:p>
             <a:pPr algn="l">
               <a:lnSpc>
-                <a:spcPts val="1015"/>
+                <a:spcPts val="956"/>
               </a:lnSpc>
             </a:pPr>
             <a:r>
-              <a:rPr sz="700" b="0">
+              <a:rPr sz="660" b="0">
                 <a:solidFill>
-                  <a:srgbClr val="4D2019"/>
+                  <a:srgbClr val="12151C"/>
                 </a:solidFill>
                 <a:latin typeface="맑은 고딕"/>
                 <a:ea typeface="맑은 고딕"/>
@@ -3417,14 +3388,14 @@
       </p:sp>
       <p:sp>
         <p:nvSpPr>
-          <p:cNvPr id="11" name="텍스트"/>
+          <p:cNvPr id="10" name="텍스트"/>
           <p:cNvSpPr txBox="1"/>
           <p:nvPr/>
         </p:nvSpPr>
         <p:spPr>
           <a:xfrm>
-            <a:off x="216000" y="1176911"/>
-            <a:ext cx="122400" cy="168911"/>
+            <a:off x="1692000" y="1458000"/>
+            <a:ext cx="331200" cy="99061"/>
           </a:xfrm>
           <a:prstGeom prst="rect">
             <a:avLst/>
@@ -3439,32 +3410,32 @@
           <a:p>
             <a:pPr algn="l">
               <a:lnSpc>
-                <a:spcPts val="1015"/>
+                <a:spcPts val="754"/>
               </a:lnSpc>
             </a:pPr>
             <a:r>
-              <a:rPr sz="700" b="1">
+              <a:rPr sz="520" b="1" spc="120">
                 <a:solidFill>
-                  <a:srgbClr val="327B60"/>
+                  <a:srgbClr val="114933"/>
                 </a:solidFill>
                 <a:latin typeface="맑은 고딕"/>
                 <a:ea typeface="맑은 고딕"/>
               </a:rPr>
-              <a:t>E</a:t>
-            </a:r>
-          </a:p>
-        </p:txBody>
-      </p:sp>
-      <p:sp>
-        <p:nvSpPr>
-          <p:cNvPr id="12" name="텍스트"/>
+              <a:t>MAIL</a:t>
+            </a:r>
+          </a:p>
+        </p:txBody>
+      </p:sp>
+      <p:sp>
+        <p:nvSpPr>
+          <p:cNvPr id="11" name="텍스트"/>
           <p:cNvSpPr txBox="1"/>
           <p:nvPr/>
         </p:nvSpPr>
         <p:spPr>
           <a:xfrm>
-            <a:off x="360000" y="1176911"/>
-            <a:ext cx="1584000" cy="168911"/>
+            <a:off x="2023200" y="1447200"/>
+            <a:ext cx="1188000" cy="125731"/>
           </a:xfrm>
           <a:prstGeom prst="rect">
             <a:avLst/>
@@ -3479,13 +3450,13 @@
           <a:p>
             <a:pPr algn="l">
               <a:lnSpc>
-                <a:spcPts val="1015"/>
+                <a:spcPts val="956"/>
               </a:lnSpc>
             </a:pPr>
             <a:r>
-              <a:rPr sz="700" b="0">
+              <a:rPr sz="660" b="0">
                 <a:solidFill>
-                  <a:srgbClr val="4D2019"/>
+                  <a:srgbClr val="12151C"/>
                 </a:solidFill>
                 <a:latin typeface="맑은 고딕"/>
                 <a:ea typeface="맑은 고딕"/>
@@ -3497,14 +3468,14 @@
       </p:sp>
       <p:sp>
         <p:nvSpPr>
-          <p:cNvPr id="13" name="텍스트"/>
+          <p:cNvPr id="12" name="텍스트"/>
           <p:cNvSpPr txBox="1"/>
           <p:nvPr/>
         </p:nvSpPr>
         <p:spPr>
           <a:xfrm>
-            <a:off x="216000" y="1345822"/>
-            <a:ext cx="122400" cy="168911"/>
+            <a:off x="1692000" y="1587600"/>
+            <a:ext cx="331200" cy="99061"/>
           </a:xfrm>
           <a:prstGeom prst="rect">
             <a:avLst/>
@@ -3519,32 +3490,32 @@
           <a:p>
             <a:pPr algn="l">
               <a:lnSpc>
-                <a:spcPts val="1015"/>
+                <a:spcPts val="754"/>
               </a:lnSpc>
             </a:pPr>
             <a:r>
-              <a:rPr sz="700" b="1">
+              <a:rPr sz="520" b="1" spc="120">
                 <a:solidFill>
-                  <a:srgbClr val="327B60"/>
+                  <a:srgbClr val="114933"/>
                 </a:solidFill>
                 <a:latin typeface="맑은 고딕"/>
                 <a:ea typeface="맑은 고딕"/>
               </a:rPr>
-              <a:t>A</a:t>
-            </a:r>
-          </a:p>
-        </p:txBody>
-      </p:sp>
-      <p:sp>
-        <p:nvSpPr>
-          <p:cNvPr id="14" name="텍스트"/>
+              <a:t>ADDR</a:t>
+            </a:r>
+          </a:p>
+        </p:txBody>
+      </p:sp>
+      <p:sp>
+        <p:nvSpPr>
+          <p:cNvPr id="13" name="텍스트"/>
           <p:cNvSpPr txBox="1"/>
           <p:nvPr/>
         </p:nvSpPr>
         <p:spPr>
           <a:xfrm>
-            <a:off x="360000" y="1345822"/>
-            <a:ext cx="1584000" cy="168911"/>
+            <a:off x="2023200" y="1576800"/>
+            <a:ext cx="1188000" cy="125731"/>
           </a:xfrm>
           <a:prstGeom prst="rect">
             <a:avLst/>
@@ -3559,13 +3530,13 @@
           <a:p>
             <a:pPr algn="l">
               <a:lnSpc>
-                <a:spcPts val="1015"/>
+                <a:spcPts val="956"/>
               </a:lnSpc>
             </a:pPr>
             <a:r>
-              <a:rPr sz="700" b="0">
+              <a:rPr sz="660" b="0">
                 <a:solidFill>
-                  <a:srgbClr val="4D2019"/>
+                  <a:srgbClr val="12151C"/>
                 </a:solidFill>
                 <a:latin typeface="맑은 고딕"/>
                 <a:ea typeface="맑은 고딕"/>
@@ -3589,7 +3560,7 @@
     <p:bg>
       <p:bgPr>
         <a:solidFill>
-          <a:srgbClr val="773227"/>
+          <a:srgbClr val="0F9D58"/>
         </a:solidFill>
         <a:effectLst/>
       </p:bgPr>
@@ -3601,413 +3572,109 @@
         <p:nvPr/>
       </p:nvGrpSpPr>
       <p:grpSpPr/>
-      <p:cxnSp>
-        <p:nvCxnSpPr>
-          <p:cNvPr id="2" name="Connector 1"/>
-          <p:cNvCxnSpPr/>
+      <p:sp>
+        <p:nvSpPr>
+          <p:cNvPr id="2" name="Freeform 1"/>
+          <p:cNvSpPr/>
           <p:nvPr/>
-        </p:nvCxnSpPr>
+        </p:nvSpPr>
         <p:spPr>
           <a:xfrm>
-            <a:off x="0" y="93600"/>
-            <a:ext cx="3240000" cy="0"/>
+            <a:off x="0" y="0"/>
+            <a:ext cx="1080000" cy="1080000"/>
           </a:xfrm>
-          <a:prstGeom prst="line">
+          <a:custGeom>
             <a:avLst/>
-          </a:prstGeom>
-          <a:ln w="7200">
-            <a:solidFill>
-              <a:srgbClr val="F1D4D0">
-                <a:alpha val="30000"/>
-              </a:srgbClr>
-            </a:solidFill>
-          </a:ln>
-        </p:spPr>
-      </p:cxnSp>
-      <p:cxnSp>
-        <p:nvCxnSpPr>
-          <p:cNvPr id="3" name="Connector 2"/>
-          <p:cNvCxnSpPr/>
-          <p:nvPr/>
-        </p:nvCxnSpPr>
-        <p:spPr>
-          <a:xfrm>
-            <a:off x="0" y="201600"/>
-            <a:ext cx="3240000" cy="0"/>
-          </a:xfrm>
-          <a:prstGeom prst="line">
-            <a:avLst/>
-          </a:prstGeom>
-          <a:ln w="7200">
-            <a:solidFill>
-              <a:srgbClr val="F1D4D0">
-                <a:alpha val="30000"/>
-              </a:srgbClr>
-            </a:solidFill>
-          </a:ln>
-        </p:spPr>
-      </p:cxnSp>
-      <p:cxnSp>
-        <p:nvCxnSpPr>
-          <p:cNvPr id="4" name="Connector 3"/>
-          <p:cNvCxnSpPr/>
-          <p:nvPr/>
-        </p:nvCxnSpPr>
-        <p:spPr>
-          <a:xfrm>
-            <a:off x="0" y="309600"/>
-            <a:ext cx="3240000" cy="0"/>
-          </a:xfrm>
-          <a:prstGeom prst="line">
-            <a:avLst/>
-          </a:prstGeom>
-          <a:ln w="7200">
-            <a:solidFill>
-              <a:srgbClr val="F1D4D0">
-                <a:alpha val="30000"/>
-              </a:srgbClr>
-            </a:solidFill>
-          </a:ln>
-        </p:spPr>
-      </p:cxnSp>
-      <p:cxnSp>
-        <p:nvCxnSpPr>
-          <p:cNvPr id="5" name="Connector 4"/>
-          <p:cNvCxnSpPr/>
-          <p:nvPr/>
-        </p:nvCxnSpPr>
-        <p:spPr>
-          <a:xfrm>
-            <a:off x="0" y="417600"/>
-            <a:ext cx="3240000" cy="0"/>
-          </a:xfrm>
-          <a:prstGeom prst="line">
-            <a:avLst/>
-          </a:prstGeom>
-          <a:ln w="7200">
-            <a:solidFill>
-              <a:srgbClr val="F1D4D0">
-                <a:alpha val="30000"/>
-              </a:srgbClr>
-            </a:solidFill>
-          </a:ln>
-        </p:spPr>
-      </p:cxnSp>
-      <p:cxnSp>
-        <p:nvCxnSpPr>
-          <p:cNvPr id="6" name="Connector 5"/>
-          <p:cNvCxnSpPr/>
-          <p:nvPr/>
-        </p:nvCxnSpPr>
-        <p:spPr>
-          <a:xfrm>
-            <a:off x="0" y="525600"/>
-            <a:ext cx="3240000" cy="0"/>
-          </a:xfrm>
-          <a:prstGeom prst="line">
-            <a:avLst/>
-          </a:prstGeom>
-          <a:ln w="7200">
-            <a:solidFill>
-              <a:srgbClr val="F1D4D0">
-                <a:alpha val="30000"/>
-              </a:srgbClr>
-            </a:solidFill>
-          </a:ln>
-        </p:spPr>
-      </p:cxnSp>
-      <p:cxnSp>
-        <p:nvCxnSpPr>
-          <p:cNvPr id="7" name="Connector 6"/>
-          <p:cNvCxnSpPr/>
-          <p:nvPr/>
-        </p:nvCxnSpPr>
-        <p:spPr>
-          <a:xfrm>
-            <a:off x="0" y="633600"/>
-            <a:ext cx="3240000" cy="0"/>
-          </a:xfrm>
-          <a:prstGeom prst="line">
-            <a:avLst/>
-          </a:prstGeom>
-          <a:ln w="7200">
-            <a:solidFill>
-              <a:srgbClr val="F1D4D0">
-                <a:alpha val="30000"/>
-              </a:srgbClr>
-            </a:solidFill>
-          </a:ln>
-        </p:spPr>
-      </p:cxnSp>
-      <p:cxnSp>
-        <p:nvCxnSpPr>
-          <p:cNvPr id="8" name="Connector 7"/>
-          <p:cNvCxnSpPr/>
-          <p:nvPr/>
-        </p:nvCxnSpPr>
-        <p:spPr>
-          <a:xfrm>
-            <a:off x="0" y="741600"/>
-            <a:ext cx="3240000" cy="0"/>
-          </a:xfrm>
-          <a:prstGeom prst="line">
-            <a:avLst/>
-          </a:prstGeom>
-          <a:ln w="7200">
-            <a:solidFill>
-              <a:srgbClr val="F1D4D0">
-                <a:alpha val="30000"/>
-              </a:srgbClr>
-            </a:solidFill>
-          </a:ln>
-        </p:spPr>
-      </p:cxnSp>
-      <p:cxnSp>
-        <p:nvCxnSpPr>
-          <p:cNvPr id="9" name="Connector 8"/>
-          <p:cNvCxnSpPr/>
-          <p:nvPr/>
-        </p:nvCxnSpPr>
-        <p:spPr>
-          <a:xfrm>
-            <a:off x="0" y="849600"/>
-            <a:ext cx="3240000" cy="0"/>
-          </a:xfrm>
-          <a:prstGeom prst="line">
-            <a:avLst/>
-          </a:prstGeom>
-          <a:ln w="7200">
-            <a:solidFill>
-              <a:srgbClr val="F1D4D0">
-                <a:alpha val="30000"/>
-              </a:srgbClr>
-            </a:solidFill>
-          </a:ln>
-        </p:spPr>
-      </p:cxnSp>
-      <p:cxnSp>
-        <p:nvCxnSpPr>
-          <p:cNvPr id="10" name="Connector 9"/>
-          <p:cNvCxnSpPr/>
-          <p:nvPr/>
-        </p:nvCxnSpPr>
-        <p:spPr>
-          <a:xfrm>
-            <a:off x="0" y="957600"/>
-            <a:ext cx="3240000" cy="0"/>
-          </a:xfrm>
-          <a:prstGeom prst="line">
-            <a:avLst/>
-          </a:prstGeom>
-          <a:ln w="7200">
-            <a:solidFill>
-              <a:srgbClr val="F1D4D0">
-                <a:alpha val="30000"/>
-              </a:srgbClr>
-            </a:solidFill>
-          </a:ln>
-        </p:spPr>
-      </p:cxnSp>
-      <p:cxnSp>
-        <p:nvCxnSpPr>
-          <p:cNvPr id="11" name="Connector 10"/>
-          <p:cNvCxnSpPr/>
-          <p:nvPr/>
-        </p:nvCxnSpPr>
-        <p:spPr>
-          <a:xfrm>
-            <a:off x="0" y="1065600"/>
-            <a:ext cx="3240000" cy="0"/>
-          </a:xfrm>
-          <a:prstGeom prst="line">
-            <a:avLst/>
-          </a:prstGeom>
-          <a:ln w="7200">
-            <a:solidFill>
-              <a:srgbClr val="F1D4D0">
-                <a:alpha val="30000"/>
-              </a:srgbClr>
-            </a:solidFill>
-          </a:ln>
-        </p:spPr>
-      </p:cxnSp>
-      <p:cxnSp>
-        <p:nvCxnSpPr>
-          <p:cNvPr id="12" name="Connector 11"/>
-          <p:cNvCxnSpPr/>
-          <p:nvPr/>
-        </p:nvCxnSpPr>
-        <p:spPr>
-          <a:xfrm>
-            <a:off x="0" y="1173600"/>
-            <a:ext cx="3240000" cy="0"/>
-          </a:xfrm>
-          <a:prstGeom prst="line">
-            <a:avLst/>
-          </a:prstGeom>
-          <a:ln w="7200">
-            <a:solidFill>
-              <a:srgbClr val="F1D4D0">
-                <a:alpha val="30000"/>
-              </a:srgbClr>
-            </a:solidFill>
-          </a:ln>
-        </p:spPr>
-      </p:cxnSp>
-      <p:cxnSp>
-        <p:nvCxnSpPr>
-          <p:cNvPr id="13" name="Connector 12"/>
-          <p:cNvCxnSpPr/>
-          <p:nvPr/>
-        </p:nvCxnSpPr>
-        <p:spPr>
-          <a:xfrm>
-            <a:off x="0" y="1281600"/>
-            <a:ext cx="3240000" cy="0"/>
-          </a:xfrm>
-          <a:prstGeom prst="line">
-            <a:avLst/>
-          </a:prstGeom>
-          <a:ln w="7200">
-            <a:solidFill>
-              <a:srgbClr val="F1D4D0">
-                <a:alpha val="30000"/>
-              </a:srgbClr>
-            </a:solidFill>
-          </a:ln>
-        </p:spPr>
-      </p:cxnSp>
-      <p:cxnSp>
-        <p:nvCxnSpPr>
-          <p:cNvPr id="14" name="Connector 13"/>
-          <p:cNvCxnSpPr/>
-          <p:nvPr/>
-        </p:nvCxnSpPr>
-        <p:spPr>
-          <a:xfrm>
-            <a:off x="0" y="1389600"/>
-            <a:ext cx="3240000" cy="0"/>
-          </a:xfrm>
-          <a:prstGeom prst="line">
-            <a:avLst/>
-          </a:prstGeom>
-          <a:ln w="7200">
-            <a:solidFill>
-              <a:srgbClr val="F1D4D0">
-                <a:alpha val="30000"/>
-              </a:srgbClr>
-            </a:solidFill>
-          </a:ln>
-        </p:spPr>
-      </p:cxnSp>
-      <p:cxnSp>
-        <p:nvCxnSpPr>
-          <p:cNvPr id="15" name="Connector 14"/>
-          <p:cNvCxnSpPr/>
-          <p:nvPr/>
-        </p:nvCxnSpPr>
-        <p:spPr>
-          <a:xfrm>
-            <a:off x="0" y="1497600"/>
-            <a:ext cx="3240000" cy="0"/>
-          </a:xfrm>
-          <a:prstGeom prst="line">
-            <a:avLst/>
-          </a:prstGeom>
-          <a:ln w="7200">
-            <a:solidFill>
-              <a:srgbClr val="F1D4D0">
-                <a:alpha val="30000"/>
-              </a:srgbClr>
-            </a:solidFill>
-          </a:ln>
-        </p:spPr>
-      </p:cxnSp>
-      <p:cxnSp>
-        <p:nvCxnSpPr>
-          <p:cNvPr id="16" name="Connector 15"/>
-          <p:cNvCxnSpPr/>
-          <p:nvPr/>
-        </p:nvCxnSpPr>
-        <p:spPr>
-          <a:xfrm>
-            <a:off x="0" y="1605600"/>
-            <a:ext cx="3240000" cy="0"/>
-          </a:xfrm>
-          <a:prstGeom prst="line">
-            <a:avLst/>
-          </a:prstGeom>
-          <a:ln w="7200">
-            <a:solidFill>
-              <a:srgbClr val="F1D4D0">
-                <a:alpha val="30000"/>
-              </a:srgbClr>
-            </a:solidFill>
-          </a:ln>
-        </p:spPr>
-      </p:cxnSp>
-      <p:cxnSp>
-        <p:nvCxnSpPr>
-          <p:cNvPr id="17" name="Connector 16"/>
-          <p:cNvCxnSpPr/>
-          <p:nvPr/>
-        </p:nvCxnSpPr>
-        <p:spPr>
-          <a:xfrm>
-            <a:off x="0" y="1713600"/>
-            <a:ext cx="3240000" cy="0"/>
-          </a:xfrm>
-          <a:prstGeom prst="line">
-            <a:avLst/>
-          </a:prstGeom>
-          <a:ln w="7200">
-            <a:solidFill>
-              <a:srgbClr val="F1D4D0">
-                <a:alpha val="30000"/>
-              </a:srgbClr>
-            </a:solidFill>
-          </a:ln>
-        </p:spPr>
-      </p:cxnSp>
-      <p:cxnSp>
-        <p:nvCxnSpPr>
-          <p:cNvPr id="18" name="Connector 17"/>
-          <p:cNvCxnSpPr/>
-          <p:nvPr/>
-        </p:nvCxnSpPr>
-        <p:spPr>
-          <a:xfrm>
-            <a:off x="0" y="1821600"/>
-            <a:ext cx="3240000" cy="0"/>
-          </a:xfrm>
-          <a:prstGeom prst="line">
-            <a:avLst/>
-          </a:prstGeom>
-          <a:ln w="7200">
-            <a:solidFill>
-              <a:srgbClr val="F1D4D0">
-                <a:alpha val="30000"/>
-              </a:srgbClr>
-            </a:solidFill>
-          </a:ln>
-        </p:spPr>
-      </p:cxnSp>
-      <p:sp>
-        <p:nvSpPr>
-          <p:cNvPr id="19" name="Rectangle 18"/>
-          <p:cNvSpPr/>
-          <p:nvPr/>
-        </p:nvSpPr>
-        <p:spPr>
-          <a:xfrm>
-            <a:off x="468000" y="468000"/>
-            <a:ext cx="2304000" cy="864000"/>
-          </a:xfrm>
-          <a:prstGeom prst="rect">
-            <a:avLst/>
-          </a:prstGeom>
+            <a:gdLst/>
+            <a:ahLst/>
+            <a:cxnLst/>
+            <a:rect l="l" t="t" r="r" b="b"/>
+            <a:pathLst>
+              <a:path w="1080000" h="1080000">
+                <a:moveTo>
+                  <a:pt x="0" y="0"/>
+                </a:moveTo>
+                <a:lnTo>
+                  <a:pt x="1080000" y="0"/>
+                </a:lnTo>
+                <a:lnTo>
+                  <a:pt x="1077688" y="70635"/>
+                </a:lnTo>
+                <a:lnTo>
+                  <a:pt x="1070760" y="140968"/>
+                </a:lnTo>
+                <a:lnTo>
+                  <a:pt x="1059248" y="210698"/>
+                </a:lnTo>
+                <a:lnTo>
+                  <a:pt x="1043200" y="279525"/>
+                </a:lnTo>
+                <a:lnTo>
+                  <a:pt x="1022685" y="347155"/>
+                </a:lnTo>
+                <a:lnTo>
+                  <a:pt x="997790" y="413298"/>
+                </a:lnTo>
+                <a:lnTo>
+                  <a:pt x="968623" y="477672"/>
+                </a:lnTo>
+                <a:lnTo>
+                  <a:pt x="935307" y="540000"/>
+                </a:lnTo>
+                <a:lnTo>
+                  <a:pt x="897987" y="600016"/>
+                </a:lnTo>
+                <a:lnTo>
+                  <a:pt x="856822" y="657462"/>
+                </a:lnTo>
+                <a:lnTo>
+                  <a:pt x="811987" y="712093"/>
+                </a:lnTo>
+                <a:lnTo>
+                  <a:pt x="763675" y="763675"/>
+                </a:lnTo>
+                <a:lnTo>
+                  <a:pt x="712093" y="811987"/>
+                </a:lnTo>
+                <a:lnTo>
+                  <a:pt x="657462" y="856822"/>
+                </a:lnTo>
+                <a:lnTo>
+                  <a:pt x="600016" y="897987"/>
+                </a:lnTo>
+                <a:lnTo>
+                  <a:pt x="540000" y="935307"/>
+                </a:lnTo>
+                <a:lnTo>
+                  <a:pt x="477672" y="968623"/>
+                </a:lnTo>
+                <a:lnTo>
+                  <a:pt x="413298" y="997790"/>
+                </a:lnTo>
+                <a:lnTo>
+                  <a:pt x="347155" y="1022685"/>
+                </a:lnTo>
+                <a:lnTo>
+                  <a:pt x="279525" y="1043200"/>
+                </a:lnTo>
+                <a:lnTo>
+                  <a:pt x="210698" y="1059248"/>
+                </a:lnTo>
+                <a:lnTo>
+                  <a:pt x="140968" y="1070760"/>
+                </a:lnTo>
+                <a:lnTo>
+                  <a:pt x="70635" y="1077688"/>
+                </a:lnTo>
+                <a:lnTo>
+                  <a:pt x="0" y="1080000"/>
+                </a:lnTo>
+                <a:close/>
+              </a:path>
+            </a:pathLst>
+          </a:custGeom>
           <a:solidFill>
-            <a:srgbClr val="773227"/>
+            <a:srgbClr val="FFFFFF"/>
           </a:solidFill>
           <a:ln>
             <a:noFill/>
@@ -4023,23 +3690,110 @@
       </p:sp>
       <p:sp>
         <p:nvSpPr>
-          <p:cNvPr id="20" name="Rectangle 19"/>
+          <p:cNvPr id="3" name="Freeform 2"/>
           <p:cNvSpPr/>
           <p:nvPr/>
         </p:nvSpPr>
         <p:spPr>
           <a:xfrm>
-            <a:off x="468000" y="468000"/>
-            <a:ext cx="2304000" cy="864000"/>
+            <a:off x="0" y="0"/>
+            <a:ext cx="684000" cy="684000"/>
           </a:xfrm>
-          <a:prstGeom prst="rect">
+          <a:custGeom>
             <a:avLst/>
-          </a:prstGeom>
-          <a:noFill/>
-          <a:ln w="9000">
-            <a:solidFill>
-              <a:srgbClr val="F1D4D0"/>
-            </a:solidFill>
+            <a:gdLst/>
+            <a:ahLst/>
+            <a:cxnLst/>
+            <a:rect l="l" t="t" r="r" b="b"/>
+            <a:pathLst>
+              <a:path w="684000" h="684000">
+                <a:moveTo>
+                  <a:pt x="0" y="0"/>
+                </a:moveTo>
+                <a:lnTo>
+                  <a:pt x="684000" y="0"/>
+                </a:lnTo>
+                <a:lnTo>
+                  <a:pt x="682536" y="44736"/>
+                </a:lnTo>
+                <a:lnTo>
+                  <a:pt x="678148" y="89280"/>
+                </a:lnTo>
+                <a:lnTo>
+                  <a:pt x="670857" y="133442"/>
+                </a:lnTo>
+                <a:lnTo>
+                  <a:pt x="660693" y="177032"/>
+                </a:lnTo>
+                <a:lnTo>
+                  <a:pt x="647700" y="219865"/>
+                </a:lnTo>
+                <a:lnTo>
+                  <a:pt x="631934" y="261755"/>
+                </a:lnTo>
+                <a:lnTo>
+                  <a:pt x="613461" y="302525"/>
+                </a:lnTo>
+                <a:lnTo>
+                  <a:pt x="592361" y="342000"/>
+                </a:lnTo>
+                <a:lnTo>
+                  <a:pt x="568725" y="380010"/>
+                </a:lnTo>
+                <a:lnTo>
+                  <a:pt x="542654" y="416393"/>
+                </a:lnTo>
+                <a:lnTo>
+                  <a:pt x="514258" y="450993"/>
+                </a:lnTo>
+                <a:lnTo>
+                  <a:pt x="483661" y="483661"/>
+                </a:lnTo>
+                <a:lnTo>
+                  <a:pt x="450993" y="514258"/>
+                </a:lnTo>
+                <a:lnTo>
+                  <a:pt x="416393" y="542654"/>
+                </a:lnTo>
+                <a:lnTo>
+                  <a:pt x="380010" y="568725"/>
+                </a:lnTo>
+                <a:lnTo>
+                  <a:pt x="342000" y="592361"/>
+                </a:lnTo>
+                <a:lnTo>
+                  <a:pt x="302525" y="613461"/>
+                </a:lnTo>
+                <a:lnTo>
+                  <a:pt x="261755" y="631934"/>
+                </a:lnTo>
+                <a:lnTo>
+                  <a:pt x="219865" y="647700"/>
+                </a:lnTo>
+                <a:lnTo>
+                  <a:pt x="177032" y="660693"/>
+                </a:lnTo>
+                <a:lnTo>
+                  <a:pt x="133442" y="670857"/>
+                </a:lnTo>
+                <a:lnTo>
+                  <a:pt x="89280" y="678148"/>
+                </a:lnTo>
+                <a:lnTo>
+                  <a:pt x="44736" y="682536"/>
+                </a:lnTo>
+                <a:lnTo>
+                  <a:pt x="0" y="684000"/>
+                </a:lnTo>
+                <a:close/>
+              </a:path>
+            </a:pathLst>
+          </a:custGeom>
+          <a:solidFill>
+            <a:srgbClr val="3FB179"/>
+          </a:solidFill>
+          <a:ln>
+            <a:noFill/>
           </a:ln>
         </p:spPr>
         <p:txBody>
@@ -4052,14 +3806,14 @@
       </p:sp>
       <p:sp>
         <p:nvSpPr>
-          <p:cNvPr id="21" name="텍스트"/>
+          <p:cNvPr id="4" name="텍스트"/>
           <p:cNvSpPr txBox="1"/>
           <p:nvPr/>
         </p:nvSpPr>
         <p:spPr>
           <a:xfrm>
-            <a:off x="576000" y="540000"/>
-            <a:ext cx="2088000" cy="720000"/>
+            <a:off x="1188000" y="1044000"/>
+            <a:ext cx="1800000" cy="432000"/>
           </a:xfrm>
           <a:prstGeom prst="rect">
             <a:avLst/>
@@ -4067,39 +3821,56 @@
           <a:noFill/>
         </p:spPr>
         <p:txBody>
-          <a:bodyPr wrap="square" lIns="0" rIns="0" tIns="0" bIns="0" anchor="ctr">
+          <a:bodyPr wrap="square" lIns="0" rIns="0" tIns="0" bIns="0" anchor="t">
             <a:spAutoFit/>
           </a:bodyPr>
           <a:lstStyle/>
           <a:p>
-            <a:pPr algn="ctr">
+            <a:pPr algn="r">
               <a:lnSpc>
-                <a:spcPts val="1667"/>
+                <a:spcPts val="1739"/>
               </a:lnSpc>
             </a:pPr>
             <a:r>
-              <a:rPr sz="1150" b="1">
+              <a:rPr sz="1200" b="1">
                 <a:solidFill>
                   <a:srgbClr val="FFFFFF"/>
                 </a:solidFill>
                 <a:latin typeface="맑은 고딕"/>
                 <a:ea typeface="맑은 고딕"/>
               </a:rPr>
-              <a:t>생활의 불편을 덜어 드립니다</a:t>
-            </a:r>
-          </a:p>
-        </p:txBody>
-      </p:sp>
-      <p:sp>
-        <p:nvSpPr>
-          <p:cNvPr id="22" name="텍스트"/>
+              <a:t>생활의 불편을</a:t>
+            </a:r>
+          </a:p>
+          <a:p>
+            <a:pPr algn="r">
+              <a:lnSpc>
+                <a:spcPts val="1739"/>
+              </a:lnSpc>
+            </a:pPr>
+            <a:r>
+              <a:rPr sz="1200" b="1">
+                <a:solidFill>
+                  <a:srgbClr val="FFFFFF"/>
+                </a:solidFill>
+                <a:latin typeface="맑은 고딕"/>
+                <a:ea typeface="맑은 고딕"/>
+              </a:rPr>
+              <a:t>덜어 드립니다</a:t>
+            </a:r>
+          </a:p>
+        </p:txBody>
+      </p:sp>
+      <p:sp>
+        <p:nvSpPr>
+          <p:cNvPr id="5" name="텍스트"/>
           <p:cNvSpPr txBox="1"/>
           <p:nvPr/>
         </p:nvSpPr>
         <p:spPr>
           <a:xfrm>
-            <a:off x="360000" y="1468800"/>
-            <a:ext cx="2520000" cy="108000"/>
+            <a:off x="1188000" y="1526400"/>
+            <a:ext cx="1800000" cy="123826"/>
           </a:xfrm>
           <a:prstGeom prst="rect">
             <a:avLst/>
@@ -4112,15 +3883,15 @@
           </a:bodyPr>
           <a:lstStyle/>
           <a:p>
-            <a:pPr algn="ctr">
+            <a:pPr algn="r">
               <a:lnSpc>
-                <a:spcPts val="1015"/>
+                <a:spcPts val="942"/>
               </a:lnSpc>
             </a:pPr>
             <a:r>
-              <a:rPr sz="700" b="1" spc="300">
+              <a:rPr sz="650" b="1" spc="200">
                 <a:solidFill>
-                  <a:srgbClr val="CFB7B3"/>
+                  <a:srgbClr val="C3E6D5"/>
                 </a:solidFill>
                 <a:latin typeface="맑은 고딕"/>
                 <a:ea typeface="맑은 고딕"/>

--- a/public/fun/cards/life/life-19.pptx
+++ b/public/fun/cards/life/life-19.pptx
@@ -3097,196 +3097,37 @@
         <p:nvPr/>
       </p:nvGrpSpPr>
       <p:grpSpPr/>
-      <p:sp>
-        <p:nvSpPr>
-          <p:cNvPr id="2" name="Oval 1"/>
+      <p:cxnSp>
+        <p:nvCxnSpPr>
+          <p:cNvPr id="2" name="Connector 1"/>
+          <p:cNvCxnSpPr/>
+          <p:nvPr/>
+        </p:nvCxnSpPr>
+        <p:spPr>
+          <a:xfrm>
+            <a:off x="1080000" y="252000"/>
+            <a:ext cx="0" cy="1296000"/>
+          </a:xfrm>
+          <a:prstGeom prst="line">
+            <a:avLst/>
+          </a:prstGeom>
+          <a:ln w="3600">
+            <a:solidFill>
+              <a:srgbClr val="BCE4D0"/>
+            </a:solidFill>
+          </a:ln>
+        </p:spPr>
+      </p:cxnSp>
+      <p:sp>
+        <p:nvSpPr>
+          <p:cNvPr id="3" name="Rectangle 2"/>
           <p:cNvSpPr/>
           <p:nvPr/>
         </p:nvSpPr>
         <p:spPr>
           <a:xfrm>
-            <a:off x="547200" y="475200"/>
-            <a:ext cx="849600" cy="849600"/>
-          </a:xfrm>
-          <a:prstGeom prst="ellipse">
-            <a:avLst/>
-          </a:prstGeom>
-          <a:solidFill>
-            <a:srgbClr val="C9E9D9"/>
-          </a:solidFill>
-          <a:ln>
-            <a:noFill/>
-          </a:ln>
-        </p:spPr>
-        <p:txBody>
-          <a:bodyPr rtlCol="0" anchor="ctr"/>
-          <a:lstStyle/>
-          <a:p>
-            <a:pPr algn="ctr"/>
-          </a:p>
-        </p:txBody>
-      </p:sp>
-      <p:sp>
-        <p:nvSpPr>
-          <p:cNvPr id="3" name="Oval 2"/>
-          <p:cNvSpPr/>
-          <p:nvPr/>
-        </p:nvSpPr>
-        <p:spPr>
-          <a:xfrm>
-            <a:off x="187200" y="475200"/>
-            <a:ext cx="849600" cy="849600"/>
-          </a:xfrm>
-          <a:prstGeom prst="ellipse">
-            <a:avLst/>
-          </a:prstGeom>
-          <a:solidFill>
-            <a:srgbClr val="0F9D58">
-              <a:alpha val="92000"/>
-            </a:srgbClr>
-          </a:solidFill>
-          <a:ln>
-            <a:noFill/>
-          </a:ln>
-        </p:spPr>
-        <p:txBody>
-          <a:bodyPr rtlCol="0" anchor="ctr"/>
-          <a:lstStyle/>
-          <a:p>
-            <a:pPr algn="ctr"/>
-          </a:p>
-        </p:txBody>
-      </p:sp>
-      <p:sp>
-        <p:nvSpPr>
-          <p:cNvPr id="4" name="텍스트"/>
-          <p:cNvSpPr txBox="1"/>
-          <p:nvPr/>
-        </p:nvSpPr>
-        <p:spPr>
-          <a:xfrm>
-            <a:off x="1692000" y="223200"/>
-            <a:ext cx="1296000" cy="133351"/>
-          </a:xfrm>
-          <a:prstGeom prst="rect">
-            <a:avLst/>
-          </a:prstGeom>
-          <a:noFill/>
-        </p:spPr>
-        <p:txBody>
-          <a:bodyPr wrap="square" lIns="0" rIns="0" tIns="0" bIns="0" anchor="t">
-            <a:spAutoFit/>
-          </a:bodyPr>
-          <a:lstStyle/>
-          <a:p>
-            <a:pPr algn="l">
-              <a:lnSpc>
-                <a:spcPts val="1015"/>
-              </a:lnSpc>
-            </a:pPr>
-            <a:r>
-              <a:rPr sz="700" b="1" spc="200">
-                <a:solidFill>
-                  <a:srgbClr val="114933"/>
-                </a:solidFill>
-                <a:latin typeface="맑은 고딕"/>
-                <a:ea typeface="맑은 고딕"/>
-              </a:rPr>
-              <a:t>상호명</a:t>
-            </a:r>
-          </a:p>
-        </p:txBody>
-      </p:sp>
-      <p:sp>
-        <p:nvSpPr>
-          <p:cNvPr id="5" name="텍스트"/>
-          <p:cNvSpPr txBox="1"/>
-          <p:nvPr/>
-        </p:nvSpPr>
-        <p:spPr>
-          <a:xfrm>
-            <a:off x="1692000" y="540000"/>
-            <a:ext cx="1368000" cy="360000"/>
-          </a:xfrm>
-          <a:prstGeom prst="rect">
-            <a:avLst/>
-          </a:prstGeom>
-          <a:noFill/>
-        </p:spPr>
-        <p:txBody>
-          <a:bodyPr wrap="square" lIns="0" rIns="0" tIns="0" bIns="0" anchor="t">
-            <a:spAutoFit/>
-          </a:bodyPr>
-          <a:lstStyle/>
-          <a:p>
-            <a:pPr algn="l">
-              <a:lnSpc>
-                <a:spcPts val="3190"/>
-              </a:lnSpc>
-            </a:pPr>
-            <a:r>
-              <a:rPr sz="2200" b="1">
-                <a:solidFill>
-                  <a:srgbClr val="12151C"/>
-                </a:solidFill>
-                <a:latin typeface="맑은 고딕"/>
-                <a:ea typeface="맑은 고딕"/>
-              </a:rPr>
-              <a:t>전보라</a:t>
-            </a:r>
-          </a:p>
-        </p:txBody>
-      </p:sp>
-      <p:sp>
-        <p:nvSpPr>
-          <p:cNvPr id="6" name="텍스트"/>
-          <p:cNvSpPr txBox="1"/>
-          <p:nvPr/>
-        </p:nvSpPr>
-        <p:spPr>
-          <a:xfrm>
-            <a:off x="1692000" y="943200"/>
-            <a:ext cx="1368000" cy="171451"/>
-          </a:xfrm>
-          <a:prstGeom prst="rect">
-            <a:avLst/>
-          </a:prstGeom>
-          <a:noFill/>
-        </p:spPr>
-        <p:txBody>
-          <a:bodyPr wrap="square" lIns="0" rIns="0" tIns="0" bIns="0" anchor="t">
-            <a:spAutoFit/>
-          </a:bodyPr>
-          <a:lstStyle/>
-          <a:p>
-            <a:pPr algn="l">
-              <a:lnSpc>
-                <a:spcPts val="1305"/>
-              </a:lnSpc>
-            </a:pPr>
-            <a:r>
-              <a:rPr sz="900" b="0">
-                <a:solidFill>
-                  <a:srgbClr val="114933"/>
-                </a:solidFill>
-                <a:latin typeface="맑은 고딕"/>
-                <a:ea typeface="맑은 고딕"/>
-              </a:rPr>
-              <a:t>열쇠·도어락 기사</a:t>
-            </a:r>
-          </a:p>
-        </p:txBody>
-      </p:sp>
-      <p:sp>
-        <p:nvSpPr>
-          <p:cNvPr id="7" name="Rectangle 6"/>
-          <p:cNvSpPr/>
-          <p:nvPr/>
-        </p:nvSpPr>
-        <p:spPr>
-          <a:xfrm>
-            <a:off x="1692000" y="1195200"/>
-            <a:ext cx="144000" cy="18000"/>
+            <a:off x="1069200" y="252000"/>
+            <a:ext cx="21600" cy="201600"/>
           </a:xfrm>
           <a:prstGeom prst="rect">
             <a:avLst/>
@@ -3308,14 +3149,14 @@
       </p:sp>
       <p:sp>
         <p:nvSpPr>
-          <p:cNvPr id="8" name="텍스트"/>
+          <p:cNvPr id="4" name="텍스트"/>
           <p:cNvSpPr txBox="1"/>
           <p:nvPr/>
         </p:nvSpPr>
         <p:spPr>
           <a:xfrm>
-            <a:off x="1692000" y="1328400"/>
-            <a:ext cx="331200" cy="99061"/>
+            <a:off x="252000" y="252000"/>
+            <a:ext cx="756000" cy="123826"/>
           </a:xfrm>
           <a:prstGeom prst="rect">
             <a:avLst/>
@@ -3330,11 +3171,221 @@
           <a:p>
             <a:pPr algn="l">
               <a:lnSpc>
-                <a:spcPts val="754"/>
+                <a:spcPts val="942"/>
               </a:lnSpc>
             </a:pPr>
             <a:r>
-              <a:rPr sz="520" b="1" spc="120">
+              <a:rPr sz="650" b="1" spc="220">
+                <a:solidFill>
+                  <a:srgbClr val="114933"/>
+                </a:solidFill>
+                <a:latin typeface="맑은 고딕"/>
+                <a:ea typeface="맑은 고딕"/>
+              </a:rPr>
+              <a:t>상호명</a:t>
+            </a:r>
+          </a:p>
+        </p:txBody>
+      </p:sp>
+      <p:sp>
+        <p:nvSpPr>
+          <p:cNvPr id="5" name="Oval 4"/>
+          <p:cNvSpPr/>
+          <p:nvPr/>
+        </p:nvSpPr>
+        <p:spPr>
+          <a:xfrm>
+            <a:off x="273600" y="734400"/>
+            <a:ext cx="244800" cy="244800"/>
+          </a:xfrm>
+          <a:prstGeom prst="ellipse">
+            <a:avLst/>
+          </a:prstGeom>
+          <a:noFill/>
+          <a:ln w="5040">
+            <a:solidFill>
+              <a:srgbClr val="0F9D58"/>
+            </a:solidFill>
+          </a:ln>
+        </p:spPr>
+        <p:txBody>
+          <a:bodyPr rtlCol="0" anchor="ctr"/>
+          <a:lstStyle/>
+          <a:p>
+            <a:pPr algn="ctr"/>
+          </a:p>
+        </p:txBody>
+      </p:sp>
+      <p:sp>
+        <p:nvSpPr>
+          <p:cNvPr id="6" name="텍스트"/>
+          <p:cNvSpPr txBox="1"/>
+          <p:nvPr/>
+        </p:nvSpPr>
+        <p:spPr>
+          <a:xfrm>
+            <a:off x="252000" y="734400"/>
+            <a:ext cx="288000" cy="252000"/>
+          </a:xfrm>
+          <a:prstGeom prst="rect">
+            <a:avLst/>
+          </a:prstGeom>
+          <a:noFill/>
+        </p:spPr>
+        <p:txBody>
+          <a:bodyPr wrap="square" lIns="0" rIns="0" tIns="0" bIns="0" anchor="ctr">
+            <a:spAutoFit/>
+          </a:bodyPr>
+          <a:lstStyle/>
+          <a:p>
+            <a:pPr algn="ctr">
+              <a:lnSpc>
+                <a:spcPts val="1305"/>
+              </a:lnSpc>
+            </a:pPr>
+            <a:r>
+              <a:rPr sz="900" b="1">
+                <a:solidFill>
+                  <a:srgbClr val="0F9D58"/>
+                </a:solidFill>
+                <a:latin typeface="맑은 고딕"/>
+                <a:ea typeface="맑은 고딕"/>
+              </a:rPr>
+              <a:t>상</a:t>
+            </a:r>
+          </a:p>
+        </p:txBody>
+      </p:sp>
+      <p:sp>
+        <p:nvSpPr>
+          <p:cNvPr id="7" name="텍스트"/>
+          <p:cNvSpPr txBox="1"/>
+          <p:nvPr/>
+        </p:nvSpPr>
+        <p:spPr>
+          <a:xfrm>
+            <a:off x="1260000" y="432000"/>
+            <a:ext cx="1800000" cy="237600"/>
+          </a:xfrm>
+          <a:prstGeom prst="rect">
+            <a:avLst/>
+          </a:prstGeom>
+          <a:noFill/>
+        </p:spPr>
+        <p:txBody>
+          <a:bodyPr wrap="square" lIns="0" rIns="0" tIns="0" bIns="0" anchor="t">
+            <a:spAutoFit/>
+          </a:bodyPr>
+          <a:lstStyle/>
+          <a:p>
+            <a:pPr algn="l">
+              <a:lnSpc>
+                <a:spcPts val="1957"/>
+              </a:lnSpc>
+            </a:pPr>
+            <a:r>
+              <a:rPr sz="1350" b="1" spc="120">
+                <a:solidFill>
+                  <a:srgbClr val="12151C"/>
+                </a:solidFill>
+                <a:latin typeface="맑은 고딕"/>
+                <a:ea typeface="맑은 고딕"/>
+              </a:rPr>
+              <a:t>전보라</a:t>
+            </a:r>
+          </a:p>
+        </p:txBody>
+      </p:sp>
+      <p:sp>
+        <p:nvSpPr>
+          <p:cNvPr id="8" name="텍스트"/>
+          <p:cNvSpPr txBox="1"/>
+          <p:nvPr/>
+        </p:nvSpPr>
+        <p:spPr>
+          <a:xfrm>
+            <a:off x="1260000" y="684000"/>
+            <a:ext cx="1800000" cy="133351"/>
+          </a:xfrm>
+          <a:prstGeom prst="rect">
+            <a:avLst/>
+          </a:prstGeom>
+          <a:noFill/>
+        </p:spPr>
+        <p:txBody>
+          <a:bodyPr wrap="square" lIns="0" rIns="0" tIns="0" bIns="0" anchor="t">
+            <a:spAutoFit/>
+          </a:bodyPr>
+          <a:lstStyle/>
+          <a:p>
+            <a:pPr algn="l">
+              <a:lnSpc>
+                <a:spcPts val="1015"/>
+              </a:lnSpc>
+            </a:pPr>
+            <a:r>
+              <a:rPr sz="700" b="0" spc="60">
+                <a:solidFill>
+                  <a:srgbClr val="114933"/>
+                </a:solidFill>
+                <a:latin typeface="맑은 고딕"/>
+                <a:ea typeface="맑은 고딕"/>
+              </a:rPr>
+              <a:t>열쇠·도어락 기사</a:t>
+            </a:r>
+          </a:p>
+        </p:txBody>
+      </p:sp>
+      <p:cxnSp>
+        <p:nvCxnSpPr>
+          <p:cNvPr id="9" name="Connector 8"/>
+          <p:cNvCxnSpPr/>
+          <p:nvPr/>
+        </p:nvCxnSpPr>
+        <p:spPr>
+          <a:xfrm>
+            <a:off x="1260000" y="943200"/>
+            <a:ext cx="1728000" cy="0"/>
+          </a:xfrm>
+          <a:prstGeom prst="line">
+            <a:avLst/>
+          </a:prstGeom>
+          <a:ln w="3600">
+            <a:solidFill>
+              <a:srgbClr val="BCE4D0"/>
+            </a:solidFill>
+          </a:ln>
+        </p:spPr>
+      </p:cxnSp>
+      <p:sp>
+        <p:nvSpPr>
+          <p:cNvPr id="10" name="텍스트"/>
+          <p:cNvSpPr txBox="1"/>
+          <p:nvPr/>
+        </p:nvSpPr>
+        <p:spPr>
+          <a:xfrm>
+            <a:off x="1260000" y="1054800"/>
+            <a:ext cx="331200" cy="91441"/>
+          </a:xfrm>
+          <a:prstGeom prst="rect">
+            <a:avLst/>
+          </a:prstGeom>
+          <a:noFill/>
+        </p:spPr>
+        <p:txBody>
+          <a:bodyPr wrap="square" lIns="0" rIns="0" tIns="0" bIns="0" anchor="t">
+            <a:spAutoFit/>
+          </a:bodyPr>
+          <a:lstStyle/>
+          <a:p>
+            <a:pPr algn="l">
+              <a:lnSpc>
+                <a:spcPts val="696"/>
+              </a:lnSpc>
+            </a:pPr>
+            <a:r>
+              <a:rPr sz="480" b="1" spc="140">
                 <a:solidFill>
                   <a:srgbClr val="114933"/>
                 </a:solidFill>
@@ -3348,14 +3399,14 @@
       </p:sp>
       <p:sp>
         <p:nvSpPr>
-          <p:cNvPr id="9" name="텍스트"/>
+          <p:cNvPr id="11" name="텍스트"/>
           <p:cNvSpPr txBox="1"/>
           <p:nvPr/>
         </p:nvSpPr>
         <p:spPr>
           <a:xfrm>
-            <a:off x="2023200" y="1317600"/>
-            <a:ext cx="1188000" cy="125731"/>
+            <a:off x="1591200" y="1044000"/>
+            <a:ext cx="1188000" cy="123826"/>
           </a:xfrm>
           <a:prstGeom prst="rect">
             <a:avLst/>
@@ -3370,11 +3421,11 @@
           <a:p>
             <a:pPr algn="l">
               <a:lnSpc>
-                <a:spcPts val="956"/>
+                <a:spcPts val="942"/>
               </a:lnSpc>
             </a:pPr>
             <a:r>
-              <a:rPr sz="660" b="0">
+              <a:rPr sz="650" b="0">
                 <a:solidFill>
                   <a:srgbClr val="12151C"/>
                 </a:solidFill>
@@ -3388,14 +3439,14 @@
       </p:sp>
       <p:sp>
         <p:nvSpPr>
-          <p:cNvPr id="10" name="텍스트"/>
+          <p:cNvPr id="12" name="텍스트"/>
           <p:cNvSpPr txBox="1"/>
           <p:nvPr/>
         </p:nvSpPr>
         <p:spPr>
           <a:xfrm>
-            <a:off x="1692000" y="1458000"/>
-            <a:ext cx="331200" cy="99061"/>
+            <a:off x="1260000" y="1184400"/>
+            <a:ext cx="331200" cy="91441"/>
           </a:xfrm>
           <a:prstGeom prst="rect">
             <a:avLst/>
@@ -3410,11 +3461,11 @@
           <a:p>
             <a:pPr algn="l">
               <a:lnSpc>
-                <a:spcPts val="754"/>
+                <a:spcPts val="696"/>
               </a:lnSpc>
             </a:pPr>
             <a:r>
-              <a:rPr sz="520" b="1" spc="120">
+              <a:rPr sz="480" b="1" spc="140">
                 <a:solidFill>
                   <a:srgbClr val="114933"/>
                 </a:solidFill>
@@ -3428,14 +3479,14 @@
       </p:sp>
       <p:sp>
         <p:nvSpPr>
-          <p:cNvPr id="11" name="텍스트"/>
+          <p:cNvPr id="13" name="텍스트"/>
           <p:cNvSpPr txBox="1"/>
           <p:nvPr/>
         </p:nvSpPr>
         <p:spPr>
           <a:xfrm>
-            <a:off x="2023200" y="1447200"/>
-            <a:ext cx="1188000" cy="125731"/>
+            <a:off x="1591200" y="1173600"/>
+            <a:ext cx="1188000" cy="123826"/>
           </a:xfrm>
           <a:prstGeom prst="rect">
             <a:avLst/>
@@ -3450,11 +3501,11 @@
           <a:p>
             <a:pPr algn="l">
               <a:lnSpc>
-                <a:spcPts val="956"/>
+                <a:spcPts val="942"/>
               </a:lnSpc>
             </a:pPr>
             <a:r>
-              <a:rPr sz="660" b="0">
+              <a:rPr sz="650" b="0">
                 <a:solidFill>
                   <a:srgbClr val="12151C"/>
                 </a:solidFill>
@@ -3468,14 +3519,14 @@
       </p:sp>
       <p:sp>
         <p:nvSpPr>
-          <p:cNvPr id="12" name="텍스트"/>
+          <p:cNvPr id="14" name="텍스트"/>
           <p:cNvSpPr txBox="1"/>
           <p:nvPr/>
         </p:nvSpPr>
         <p:spPr>
           <a:xfrm>
-            <a:off x="1692000" y="1587600"/>
-            <a:ext cx="331200" cy="99061"/>
+            <a:off x="1260000" y="1314000"/>
+            <a:ext cx="331200" cy="91441"/>
           </a:xfrm>
           <a:prstGeom prst="rect">
             <a:avLst/>
@@ -3490,11 +3541,11 @@
           <a:p>
             <a:pPr algn="l">
               <a:lnSpc>
-                <a:spcPts val="754"/>
+                <a:spcPts val="696"/>
               </a:lnSpc>
             </a:pPr>
             <a:r>
-              <a:rPr sz="520" b="1" spc="120">
+              <a:rPr sz="480" b="1" spc="140">
                 <a:solidFill>
                   <a:srgbClr val="114933"/>
                 </a:solidFill>
@@ -3508,14 +3559,14 @@
       </p:sp>
       <p:sp>
         <p:nvSpPr>
-          <p:cNvPr id="13" name="텍스트"/>
+          <p:cNvPr id="15" name="텍스트"/>
           <p:cNvSpPr txBox="1"/>
           <p:nvPr/>
         </p:nvSpPr>
         <p:spPr>
           <a:xfrm>
-            <a:off x="2023200" y="1576800"/>
-            <a:ext cx="1188000" cy="125731"/>
+            <a:off x="1591200" y="1303200"/>
+            <a:ext cx="1188000" cy="123826"/>
           </a:xfrm>
           <a:prstGeom prst="rect">
             <a:avLst/>
@@ -3530,11 +3581,11 @@
           <a:p>
             <a:pPr algn="l">
               <a:lnSpc>
-                <a:spcPts val="956"/>
+                <a:spcPts val="942"/>
               </a:lnSpc>
             </a:pPr>
             <a:r>
-              <a:rPr sz="660" b="0">
+              <a:rPr sz="650" b="0">
                 <a:solidFill>
                   <a:srgbClr val="12151C"/>
                 </a:solidFill>
@@ -3572,248 +3623,184 @@
         <p:nvPr/>
       </p:nvGrpSpPr>
       <p:grpSpPr/>
-      <p:sp>
-        <p:nvSpPr>
-          <p:cNvPr id="2" name="Freeform 1"/>
-          <p:cNvSpPr/>
+      <p:cxnSp>
+        <p:nvCxnSpPr>
+          <p:cNvPr id="2" name="Connector 1"/>
+          <p:cNvCxnSpPr/>
           <p:nvPr/>
-        </p:nvSpPr>
-        <p:spPr>
-          <a:xfrm>
-            <a:off x="0" y="0"/>
-            <a:ext cx="1080000" cy="1080000"/>
-          </a:xfrm>
-          <a:custGeom>
+        </p:nvCxnSpPr>
+        <p:spPr>
+          <a:xfrm>
+            <a:off x="79200" y="108000"/>
+            <a:ext cx="57600" cy="0"/>
+          </a:xfrm>
+          <a:prstGeom prst="line">
             <a:avLst/>
-            <a:gdLst/>
-            <a:ahLst/>
-            <a:cxnLst/>
-            <a:rect l="l" t="t" r="r" b="b"/>
-            <a:pathLst>
-              <a:path w="1080000" h="1080000">
-                <a:moveTo>
-                  <a:pt x="0" y="0"/>
-                </a:moveTo>
-                <a:lnTo>
-                  <a:pt x="1080000" y="0"/>
-                </a:lnTo>
-                <a:lnTo>
-                  <a:pt x="1077688" y="70635"/>
-                </a:lnTo>
-                <a:lnTo>
-                  <a:pt x="1070760" y="140968"/>
-                </a:lnTo>
-                <a:lnTo>
-                  <a:pt x="1059248" y="210698"/>
-                </a:lnTo>
-                <a:lnTo>
-                  <a:pt x="1043200" y="279525"/>
-                </a:lnTo>
-                <a:lnTo>
-                  <a:pt x="1022685" y="347155"/>
-                </a:lnTo>
-                <a:lnTo>
-                  <a:pt x="997790" y="413298"/>
-                </a:lnTo>
-                <a:lnTo>
-                  <a:pt x="968623" y="477672"/>
-                </a:lnTo>
-                <a:lnTo>
-                  <a:pt x="935307" y="540000"/>
-                </a:lnTo>
-                <a:lnTo>
-                  <a:pt x="897987" y="600016"/>
-                </a:lnTo>
-                <a:lnTo>
-                  <a:pt x="856822" y="657462"/>
-                </a:lnTo>
-                <a:lnTo>
-                  <a:pt x="811987" y="712093"/>
-                </a:lnTo>
-                <a:lnTo>
-                  <a:pt x="763675" y="763675"/>
-                </a:lnTo>
-                <a:lnTo>
-                  <a:pt x="712093" y="811987"/>
-                </a:lnTo>
-                <a:lnTo>
-                  <a:pt x="657462" y="856822"/>
-                </a:lnTo>
-                <a:lnTo>
-                  <a:pt x="600016" y="897987"/>
-                </a:lnTo>
-                <a:lnTo>
-                  <a:pt x="540000" y="935307"/>
-                </a:lnTo>
-                <a:lnTo>
-                  <a:pt x="477672" y="968623"/>
-                </a:lnTo>
-                <a:lnTo>
-                  <a:pt x="413298" y="997790"/>
-                </a:lnTo>
-                <a:lnTo>
-                  <a:pt x="347155" y="1022685"/>
-                </a:lnTo>
-                <a:lnTo>
-                  <a:pt x="279525" y="1043200"/>
-                </a:lnTo>
-                <a:lnTo>
-                  <a:pt x="210698" y="1059248"/>
-                </a:lnTo>
-                <a:lnTo>
-                  <a:pt x="140968" y="1070760"/>
-                </a:lnTo>
-                <a:lnTo>
-                  <a:pt x="70635" y="1077688"/>
-                </a:lnTo>
-                <a:lnTo>
-                  <a:pt x="0" y="1080000"/>
-                </a:lnTo>
-                <a:close/>
-              </a:path>
-            </a:pathLst>
-          </a:custGeom>
-          <a:solidFill>
-            <a:srgbClr val="FFFFFF"/>
-          </a:solidFill>
-          <a:ln>
-            <a:noFill/>
+          </a:prstGeom>
+          <a:ln w="3600">
+            <a:solidFill>
+              <a:srgbClr val="C3E6D5"/>
+            </a:solidFill>
           </a:ln>
         </p:spPr>
-        <p:txBody>
-          <a:bodyPr rtlCol="0" anchor="ctr"/>
-          <a:lstStyle/>
-          <a:p>
-            <a:pPr algn="ctr"/>
-          </a:p>
-        </p:txBody>
-      </p:sp>
-      <p:sp>
-        <p:nvSpPr>
-          <p:cNvPr id="3" name="Freeform 2"/>
-          <p:cNvSpPr/>
+      </p:cxnSp>
+      <p:cxnSp>
+        <p:nvCxnSpPr>
+          <p:cNvPr id="3" name="Connector 2"/>
+          <p:cNvCxnSpPr/>
           <p:nvPr/>
-        </p:nvSpPr>
-        <p:spPr>
-          <a:xfrm>
-            <a:off x="0" y="0"/>
-            <a:ext cx="684000" cy="684000"/>
-          </a:xfrm>
-          <a:custGeom>
+        </p:nvCxnSpPr>
+        <p:spPr>
+          <a:xfrm>
+            <a:off x="108000" y="79200"/>
+            <a:ext cx="0" cy="57600"/>
+          </a:xfrm>
+          <a:prstGeom prst="line">
             <a:avLst/>
-            <a:gdLst/>
-            <a:ahLst/>
-            <a:cxnLst/>
-            <a:rect l="l" t="t" r="r" b="b"/>
-            <a:pathLst>
-              <a:path w="684000" h="684000">
-                <a:moveTo>
-                  <a:pt x="0" y="0"/>
-                </a:moveTo>
-                <a:lnTo>
-                  <a:pt x="684000" y="0"/>
-                </a:lnTo>
-                <a:lnTo>
-                  <a:pt x="682536" y="44736"/>
-                </a:lnTo>
-                <a:lnTo>
-                  <a:pt x="678148" y="89280"/>
-                </a:lnTo>
-                <a:lnTo>
-                  <a:pt x="670857" y="133442"/>
-                </a:lnTo>
-                <a:lnTo>
-                  <a:pt x="660693" y="177032"/>
-                </a:lnTo>
-                <a:lnTo>
-                  <a:pt x="647700" y="219865"/>
-                </a:lnTo>
-                <a:lnTo>
-                  <a:pt x="631934" y="261755"/>
-                </a:lnTo>
-                <a:lnTo>
-                  <a:pt x="613461" y="302525"/>
-                </a:lnTo>
-                <a:lnTo>
-                  <a:pt x="592361" y="342000"/>
-                </a:lnTo>
-                <a:lnTo>
-                  <a:pt x="568725" y="380010"/>
-                </a:lnTo>
-                <a:lnTo>
-                  <a:pt x="542654" y="416393"/>
-                </a:lnTo>
-                <a:lnTo>
-                  <a:pt x="514258" y="450993"/>
-                </a:lnTo>
-                <a:lnTo>
-                  <a:pt x="483661" y="483661"/>
-                </a:lnTo>
-                <a:lnTo>
-                  <a:pt x="450993" y="514258"/>
-                </a:lnTo>
-                <a:lnTo>
-                  <a:pt x="416393" y="542654"/>
-                </a:lnTo>
-                <a:lnTo>
-                  <a:pt x="380010" y="568725"/>
-                </a:lnTo>
-                <a:lnTo>
-                  <a:pt x="342000" y="592361"/>
-                </a:lnTo>
-                <a:lnTo>
-                  <a:pt x="302525" y="613461"/>
-                </a:lnTo>
-                <a:lnTo>
-                  <a:pt x="261755" y="631934"/>
-                </a:lnTo>
-                <a:lnTo>
-                  <a:pt x="219865" y="647700"/>
-                </a:lnTo>
-                <a:lnTo>
-                  <a:pt x="177032" y="660693"/>
-                </a:lnTo>
-                <a:lnTo>
-                  <a:pt x="133442" y="670857"/>
-                </a:lnTo>
-                <a:lnTo>
-                  <a:pt x="89280" y="678148"/>
-                </a:lnTo>
-                <a:lnTo>
-                  <a:pt x="44736" y="682536"/>
-                </a:lnTo>
-                <a:lnTo>
-                  <a:pt x="0" y="684000"/>
-                </a:lnTo>
-                <a:close/>
-              </a:path>
-            </a:pathLst>
-          </a:custGeom>
-          <a:solidFill>
-            <a:srgbClr val="3FB179"/>
-          </a:solidFill>
-          <a:ln>
-            <a:noFill/>
+          </a:prstGeom>
+          <a:ln w="3600">
+            <a:solidFill>
+              <a:srgbClr val="C3E6D5"/>
+            </a:solidFill>
           </a:ln>
         </p:spPr>
-        <p:txBody>
-          <a:bodyPr rtlCol="0" anchor="ctr"/>
-          <a:lstStyle/>
-          <a:p>
-            <a:pPr algn="ctr"/>
-          </a:p>
-        </p:txBody>
-      </p:sp>
-      <p:sp>
-        <p:nvSpPr>
-          <p:cNvPr id="4" name="텍스트"/>
+      </p:cxnSp>
+      <p:cxnSp>
+        <p:nvCxnSpPr>
+          <p:cNvPr id="4" name="Connector 3"/>
+          <p:cNvCxnSpPr/>
+          <p:nvPr/>
+        </p:nvCxnSpPr>
+        <p:spPr>
+          <a:xfrm>
+            <a:off x="3103200" y="108000"/>
+            <a:ext cx="57600" cy="0"/>
+          </a:xfrm>
+          <a:prstGeom prst="line">
+            <a:avLst/>
+          </a:prstGeom>
+          <a:ln w="3600">
+            <a:solidFill>
+              <a:srgbClr val="C3E6D5"/>
+            </a:solidFill>
+          </a:ln>
+        </p:spPr>
+      </p:cxnSp>
+      <p:cxnSp>
+        <p:nvCxnSpPr>
+          <p:cNvPr id="5" name="Connector 4"/>
+          <p:cNvCxnSpPr/>
+          <p:nvPr/>
+        </p:nvCxnSpPr>
+        <p:spPr>
+          <a:xfrm>
+            <a:off x="3132000" y="79200"/>
+            <a:ext cx="0" cy="57600"/>
+          </a:xfrm>
+          <a:prstGeom prst="line">
+            <a:avLst/>
+          </a:prstGeom>
+          <a:ln w="3600">
+            <a:solidFill>
+              <a:srgbClr val="C3E6D5"/>
+            </a:solidFill>
+          </a:ln>
+        </p:spPr>
+      </p:cxnSp>
+      <p:cxnSp>
+        <p:nvCxnSpPr>
+          <p:cNvPr id="6" name="Connector 5"/>
+          <p:cNvCxnSpPr/>
+          <p:nvPr/>
+        </p:nvCxnSpPr>
+        <p:spPr>
+          <a:xfrm>
+            <a:off x="79200" y="1692000"/>
+            <a:ext cx="57600" cy="0"/>
+          </a:xfrm>
+          <a:prstGeom prst="line">
+            <a:avLst/>
+          </a:prstGeom>
+          <a:ln w="3600">
+            <a:solidFill>
+              <a:srgbClr val="C3E6D5"/>
+            </a:solidFill>
+          </a:ln>
+        </p:spPr>
+      </p:cxnSp>
+      <p:cxnSp>
+        <p:nvCxnSpPr>
+          <p:cNvPr id="7" name="Connector 6"/>
+          <p:cNvCxnSpPr/>
+          <p:nvPr/>
+        </p:nvCxnSpPr>
+        <p:spPr>
+          <a:xfrm>
+            <a:off x="108000" y="1663200"/>
+            <a:ext cx="0" cy="57600"/>
+          </a:xfrm>
+          <a:prstGeom prst="line">
+            <a:avLst/>
+          </a:prstGeom>
+          <a:ln w="3600">
+            <a:solidFill>
+              <a:srgbClr val="C3E6D5"/>
+            </a:solidFill>
+          </a:ln>
+        </p:spPr>
+      </p:cxnSp>
+      <p:cxnSp>
+        <p:nvCxnSpPr>
+          <p:cNvPr id="8" name="Connector 7"/>
+          <p:cNvCxnSpPr/>
+          <p:nvPr/>
+        </p:nvCxnSpPr>
+        <p:spPr>
+          <a:xfrm>
+            <a:off x="3103200" y="1692000"/>
+            <a:ext cx="57600" cy="0"/>
+          </a:xfrm>
+          <a:prstGeom prst="line">
+            <a:avLst/>
+          </a:prstGeom>
+          <a:ln w="3600">
+            <a:solidFill>
+              <a:srgbClr val="C3E6D5"/>
+            </a:solidFill>
+          </a:ln>
+        </p:spPr>
+      </p:cxnSp>
+      <p:cxnSp>
+        <p:nvCxnSpPr>
+          <p:cNvPr id="9" name="Connector 8"/>
+          <p:cNvCxnSpPr/>
+          <p:nvPr/>
+        </p:nvCxnSpPr>
+        <p:spPr>
+          <a:xfrm>
+            <a:off x="3132000" y="1663200"/>
+            <a:ext cx="0" cy="57600"/>
+          </a:xfrm>
+          <a:prstGeom prst="line">
+            <a:avLst/>
+          </a:prstGeom>
+          <a:ln w="3600">
+            <a:solidFill>
+              <a:srgbClr val="C3E6D5"/>
+            </a:solidFill>
+          </a:ln>
+        </p:spPr>
+      </p:cxnSp>
+      <p:sp>
+        <p:nvSpPr>
+          <p:cNvPr id="10" name="텍스트"/>
           <p:cNvSpPr txBox="1"/>
           <p:nvPr/>
         </p:nvSpPr>
         <p:spPr>
           <a:xfrm>
-            <a:off x="1188000" y="1044000"/>
-            <a:ext cx="1800000" cy="432000"/>
+            <a:off x="252000" y="288000"/>
+            <a:ext cx="2520000" cy="123826"/>
           </a:xfrm>
           <a:prstGeom prst="rect">
             <a:avLst/>
@@ -3826,70 +3813,13 @@
           </a:bodyPr>
           <a:lstStyle/>
           <a:p>
-            <a:pPr algn="r">
-              <a:lnSpc>
-                <a:spcPts val="1739"/>
-              </a:lnSpc>
-            </a:pPr>
-            <a:r>
-              <a:rPr sz="1200" b="1">
-                <a:solidFill>
-                  <a:srgbClr val="FFFFFF"/>
-                </a:solidFill>
-                <a:latin typeface="맑은 고딕"/>
-                <a:ea typeface="맑은 고딕"/>
-              </a:rPr>
-              <a:t>생활의 불편을</a:t>
-            </a:r>
-          </a:p>
-          <a:p>
-            <a:pPr algn="r">
-              <a:lnSpc>
-                <a:spcPts val="1739"/>
-              </a:lnSpc>
-            </a:pPr>
-            <a:r>
-              <a:rPr sz="1200" b="1">
-                <a:solidFill>
-                  <a:srgbClr val="FFFFFF"/>
-                </a:solidFill>
-                <a:latin typeface="맑은 고딕"/>
-                <a:ea typeface="맑은 고딕"/>
-              </a:rPr>
-              <a:t>덜어 드립니다</a:t>
-            </a:r>
-          </a:p>
-        </p:txBody>
-      </p:sp>
-      <p:sp>
-        <p:nvSpPr>
-          <p:cNvPr id="5" name="텍스트"/>
-          <p:cNvSpPr txBox="1"/>
-          <p:nvPr/>
-        </p:nvSpPr>
-        <p:spPr>
-          <a:xfrm>
-            <a:off x="1188000" y="1526400"/>
-            <a:ext cx="1800000" cy="123826"/>
-          </a:xfrm>
-          <a:prstGeom prst="rect">
-            <a:avLst/>
-          </a:prstGeom>
-          <a:noFill/>
-        </p:spPr>
-        <p:txBody>
-          <a:bodyPr wrap="square" lIns="0" rIns="0" tIns="0" bIns="0" anchor="t">
-            <a:spAutoFit/>
-          </a:bodyPr>
-          <a:lstStyle/>
-          <a:p>
-            <a:pPr algn="r">
+            <a:pPr algn="ctr">
               <a:lnSpc>
                 <a:spcPts val="942"/>
               </a:lnSpc>
             </a:pPr>
             <a:r>
-              <a:rPr sz="650" b="1" spc="200">
+              <a:rPr sz="650" b="1" spc="220">
                 <a:solidFill>
                   <a:srgbClr val="C3E6D5"/>
                 </a:solidFill>
@@ -3897,6 +3827,237 @@
                 <a:ea typeface="맑은 고딕"/>
               </a:rPr>
               <a:t>상호명</a:t>
+            </a:r>
+          </a:p>
+        </p:txBody>
+      </p:sp>
+      <p:sp>
+        <p:nvSpPr>
+          <p:cNvPr id="11" name="Rectangle 10"/>
+          <p:cNvSpPr/>
+          <p:nvPr/>
+        </p:nvSpPr>
+        <p:spPr>
+          <a:xfrm>
+            <a:off x="1530000" y="453600"/>
+            <a:ext cx="180000" cy="14400"/>
+          </a:xfrm>
+          <a:prstGeom prst="rect">
+            <a:avLst/>
+          </a:prstGeom>
+          <a:solidFill>
+            <a:srgbClr val="FFFFFF"/>
+          </a:solidFill>
+          <a:ln>
+            <a:noFill/>
+          </a:ln>
+        </p:spPr>
+        <p:txBody>
+          <a:bodyPr rtlCol="0" anchor="ctr"/>
+          <a:lstStyle/>
+          <a:p>
+            <a:pPr algn="ctr"/>
+          </a:p>
+        </p:txBody>
+      </p:sp>
+      <p:sp>
+        <p:nvSpPr>
+          <p:cNvPr id="12" name="텍스트"/>
+          <p:cNvSpPr txBox="1"/>
+          <p:nvPr/>
+        </p:nvSpPr>
+        <p:spPr>
+          <a:xfrm>
+            <a:off x="360000" y="619200"/>
+            <a:ext cx="2520000" cy="99061"/>
+          </a:xfrm>
+          <a:prstGeom prst="rect">
+            <a:avLst/>
+          </a:prstGeom>
+          <a:noFill/>
+        </p:spPr>
+        <p:txBody>
+          <a:bodyPr wrap="square" lIns="0" rIns="0" tIns="0" bIns="0" anchor="t">
+            <a:spAutoFit/>
+          </a:bodyPr>
+          <a:lstStyle/>
+          <a:p>
+            <a:pPr algn="ctr">
+              <a:lnSpc>
+                <a:spcPts val="754"/>
+              </a:lnSpc>
+            </a:pPr>
+            <a:r>
+              <a:rPr sz="520" b="1" spc="240">
+                <a:solidFill>
+                  <a:srgbClr val="C3E6D5"/>
+                </a:solidFill>
+                <a:latin typeface="맑은 고딕"/>
+                <a:ea typeface="맑은 고딕"/>
+              </a:rPr>
+              <a:t>취급 품목</a:t>
+            </a:r>
+          </a:p>
+        </p:txBody>
+      </p:sp>
+      <p:sp>
+        <p:nvSpPr>
+          <p:cNvPr id="13" name="텍스트"/>
+          <p:cNvSpPr txBox="1"/>
+          <p:nvPr/>
+        </p:nvSpPr>
+        <p:spPr>
+          <a:xfrm>
+            <a:off x="360000" y="741600"/>
+            <a:ext cx="2520000" cy="396000"/>
+          </a:xfrm>
+          <a:prstGeom prst="rect">
+            <a:avLst/>
+          </a:prstGeom>
+          <a:noFill/>
+        </p:spPr>
+        <p:txBody>
+          <a:bodyPr wrap="square" lIns="0" rIns="0" tIns="0" bIns="0" anchor="t">
+            <a:spAutoFit/>
+          </a:bodyPr>
+          <a:lstStyle/>
+          <a:p>
+            <a:pPr algn="ctr">
+              <a:lnSpc>
+                <a:spcPts val="1188"/>
+              </a:lnSpc>
+            </a:pPr>
+            <a:r>
+              <a:rPr sz="819" b="1">
+                <a:solidFill>
+                  <a:srgbClr val="FFFFFF"/>
+                </a:solidFill>
+                <a:latin typeface="맑은 고딕"/>
+                <a:ea typeface="맑은 고딕"/>
+              </a:rPr>
+              <a:t>세탁 · 수선  ·  도배 · 장판  ·  이사 정리  ·  방문 견적</a:t>
+            </a:r>
+          </a:p>
+        </p:txBody>
+      </p:sp>
+      <p:cxnSp>
+        <p:nvCxnSpPr>
+          <p:cNvPr id="14" name="Connector 13"/>
+          <p:cNvCxnSpPr/>
+          <p:nvPr/>
+        </p:nvCxnSpPr>
+        <p:spPr>
+          <a:xfrm>
+            <a:off x="360000" y="1224000"/>
+            <a:ext cx="2520000" cy="0"/>
+          </a:xfrm>
+          <a:prstGeom prst="line">
+            <a:avLst/>
+          </a:prstGeom>
+          <a:ln w="3600">
+            <a:solidFill>
+              <a:srgbClr val="6FC49B"/>
+            </a:solidFill>
+          </a:ln>
+        </p:spPr>
+      </p:cxnSp>
+      <p:sp>
+        <p:nvSpPr>
+          <p:cNvPr id="15" name="텍스트"/>
+          <p:cNvSpPr txBox="1"/>
+          <p:nvPr/>
+        </p:nvSpPr>
+        <p:spPr>
+          <a:xfrm>
+            <a:off x="360000" y="1317600"/>
+            <a:ext cx="1224000" cy="118111"/>
+          </a:xfrm>
+          <a:prstGeom prst="rect">
+            <a:avLst/>
+          </a:prstGeom>
+          <a:noFill/>
+        </p:spPr>
+        <p:txBody>
+          <a:bodyPr wrap="square" lIns="0" rIns="0" tIns="0" bIns="0" anchor="t">
+            <a:spAutoFit/>
+          </a:bodyPr>
+          <a:lstStyle/>
+          <a:p>
+            <a:pPr algn="ctr">
+              <a:lnSpc>
+                <a:spcPts val="899"/>
+              </a:lnSpc>
+            </a:pPr>
+            <a:r>
+              <a:rPr sz="620" b="0">
+                <a:solidFill>
+                  <a:srgbClr val="FFFFFF"/>
+                </a:solidFill>
+                <a:latin typeface="맑은 고딕"/>
+                <a:ea typeface="맑은 고딕"/>
+              </a:rPr>
+              <a:t>평일 09:00 – 19:00</a:t>
+            </a:r>
+          </a:p>
+        </p:txBody>
+      </p:sp>
+      <p:cxnSp>
+        <p:nvCxnSpPr>
+          <p:cNvPr id="16" name="Connector 15"/>
+          <p:cNvCxnSpPr/>
+          <p:nvPr/>
+        </p:nvCxnSpPr>
+        <p:spPr>
+          <a:xfrm>
+            <a:off x="1620000" y="1296000"/>
+            <a:ext cx="0" cy="180000"/>
+          </a:xfrm>
+          <a:prstGeom prst="line">
+            <a:avLst/>
+          </a:prstGeom>
+          <a:ln w="3600">
+            <a:solidFill>
+              <a:srgbClr val="6FC49B"/>
+            </a:solidFill>
+          </a:ln>
+        </p:spPr>
+      </p:cxnSp>
+      <p:sp>
+        <p:nvSpPr>
+          <p:cNvPr id="17" name="텍스트"/>
+          <p:cNvSpPr txBox="1"/>
+          <p:nvPr/>
+        </p:nvSpPr>
+        <p:spPr>
+          <a:xfrm>
+            <a:off x="1656000" y="1317600"/>
+            <a:ext cx="1224000" cy="118111"/>
+          </a:xfrm>
+          <a:prstGeom prst="rect">
+            <a:avLst/>
+          </a:prstGeom>
+          <a:noFill/>
+        </p:spPr>
+        <p:txBody>
+          <a:bodyPr wrap="square" lIns="0" rIns="0" tIns="0" bIns="0" anchor="t">
+            <a:spAutoFit/>
+          </a:bodyPr>
+          <a:lstStyle/>
+          <a:p>
+            <a:pPr algn="ctr">
+              <a:lnSpc>
+                <a:spcPts val="899"/>
+              </a:lnSpc>
+            </a:pPr>
+            <a:r>
+              <a:rPr sz="620" b="0">
+                <a:solidFill>
+                  <a:srgbClr val="FFFFFF"/>
+                </a:solidFill>
+                <a:latin typeface="맑은 고딕"/>
+                <a:ea typeface="맑은 고딕"/>
+              </a:rPr>
+              <a:t>@아이디</a:t>
             </a:r>
           </a:p>
         </p:txBody>
